--- a/decks/hist-mughal-india/hist-mughal-india_ch3_culture.pptx
+++ b/decks/hist-mughal-india/hist-mughal-india_ch3_culture.pptx
@@ -126,30 +126,30 @@
   <p:extLst>
     <p:ext uri="{521415D9-36F7-43E2-AB2F-B90AF26B5E84}">
       <p14:sectionLst xmlns:p14="http://schemas.microsoft.com/office/powerpoint/2010/main">
-        <p14:section name="Opening" id="{6ce1d113-ff53-d43f-e94e-c627eeb114e3}">
+        <p14:section name="Opening" id="{030804f1-9e9b-ddf4-38aa-558638f1244f}">
           <p14:sldIdLst>
             <p14:sldId id="256"/>
           </p14:sldIdLst>
         </p14:section>
-        <p14:section name="Gate" id="{4f7e07e8-5a52-f87d-8972-b05ca964efd6}">
+        <p14:section name="Gate" id="{877c7fe3-5903-fd3e-2042-6ff4f83097d2}">
           <p14:sldIdLst>
             <p14:sldId id="257"/>
             <p14:sldId id="258"/>
           </p14:sldIdLst>
         </p14:section>
-        <p14:section name="Pre-teach" id="{a2445c93-e97a-8a0f-51df-77f5684385ac}">
+        <p14:section name="Pre-teach" id="{defed0fc-f32e-5eea-1a30-98c99efb4376}">
           <p14:sldIdLst>
             <p14:sldId id="259"/>
             <p14:sldId id="260"/>
           </p14:sldIdLst>
         </p14:section>
-        <p14:section name="Read-along" id="{8e22e89d-b695-8e9f-0e13-8fd608c5b8aa}">
+        <p14:section name="Read-along" id="{d1c96c84-ba3f-f8c5-5b1b-a6929467fc30}">
           <p14:sldIdLst>
             <p14:sldId id="261"/>
             <p14:sldId id="262"/>
           </p14:sldIdLst>
         </p14:section>
-        <p14:section name="Teach" id="{d3503ccd-0988-f6bb-bb20-42042385720c}">
+        <p14:section name="Teach" id="{df924e26-52bd-0a28-e597-939a9230d44e}">
           <p14:sldIdLst>
             <p14:sldId id="263"/>
             <p14:sldId id="264"/>
@@ -158,7 +158,7 @@
             <p14:sldId id="267"/>
           </p14:sldIdLst>
         </p14:section>
-        <p14:section name="Routes" id="{558cefc8-9810-15be-45d0-f3d1edd107c6}">
+        <p14:section name="Routes" id="{9e470db1-829b-6be8-1372-6f82679c40cb}">
           <p14:sldIdLst>
             <p14:sldId id="268"/>
             <p14:sldId id="269"/>
@@ -166,12 +166,12 @@
             <p14:sldId id="271"/>
           </p14:sldIdLst>
         </p14:section>
-        <p14:section name="Close" id="{3ea80149-e28d-c431-70fe-edcfdf85e503}">
+        <p14:section name="Close" id="{6846dced-822b-aa00-690e-7e0497a0fa7e}">
           <p14:sldIdLst>
             <p14:sldId id="272"/>
           </p14:sldIdLst>
         </p14:section>
-        <p14:section name="Answers" id="{90156bb0-ecb8-8bc5-9bf0-e495517b2886}">
+        <p14:section name="Answers" id="{e9a49a46-8b10-d94f-e62b-398851581079}">
           <p14:sldIdLst>
             <p14:sldId id="273"/>
             <p14:sldId id="274"/>
@@ -767,7 +767,7 @@
             <a:r>
               <a:rPr lang="en-US" dirty="0"/>
               <a:t>Teach — Miniature paintings and the halo. Say it in your own words, then check understanding with a quick question: ask a pupil from the pre-teach group first, since they met these words and ideas before the lesson. Pupils try to recall before you re-explain.
-Mughal paintings are known as miniatures because they were small enough to fit into a book. Like the buildings, they blend styles: the bold, vivid colours Indian painters loved, the fine delicate lines Persian painters preferred, and a European influence brought to India by missionaries.
+Mughal paintings are called miniatures, because they were painted small, often small enough to sit on the page of a book. Like the buildings, they blend styles: the bold, vivid colours Indian painters loved, the fine delicate lines Persian painters preferred, and a European influence brought to India by missionaries.
 Paintings in history are full of symbols. A halo around an emperor's head is a symbol that he was religious and close to God. Fine clothes, jewels and elephants were symbols of wealth and power. When you look at a portrait of an emperor, ask what the painter was told to make you see and think.
 This creates a problem for historians, which your lesson's plenary asks about. A portrait shows how the emperor wanted to be remembered, not necessarily how he was. Jahangir's portraits show a calm, godly ruler; your own knowledge tells you he struggled with alcohol and drugs. The painting is evidence about his image, not proof about his life.
 Tip: Describe, infer, own knowledge: that is the three-step route through any Mughal portrait.</a:t>
@@ -860,7 +860,7 @@
               <a:rPr lang="en-US" dirty="0"/>
               <a:t>Teach — Music, books, languages and games. Say it in your own words, then check understanding with a quick question: ask a pupil from the pre-teach group first, since they met these words and ideas before the lesson. Pupils try to recall before you re-explain.
 Many emperors enjoyed music, and Akbar was a musician himself who liked singing Hindu songs. He kept 36 experienced musicians at his court, and it was there that Hindu and Muslim music mingled and became one. The Empire is remembered for merging these two styles into the music of India today. Music, in other words, helped bring different peoples together.
-Akbar had his court historian write the Akbarnama, the Book of Akbar, in three volumes: the first on his birth and the reigns of Babur and Humayun, the second on his own reign, and the third on the Empire and the many cultures of India. It is a valuable source for historians today. Poetry thrived, and many Greek, Arabic, Turkish and Sanskrit books were translated into Persian so that more people could read them.
+Akbar had his court historian write the Akbarnama, the Book of Akbar, in three volumes: one on his birth and on the reigns of Babur and Humayun, one on his own reign, and one on the Empire and the many cultures of India. It is a valuable source for historians today. Poetry thrived, and many Greek, Arabic, Turkish and Sanskrit books were translated into Persian so that more people could read them.
 The Empire had many languages, including Persian, Arabic and Hindavi, and a new one, Urdu, was born there and is still spoken today. Mughals played chess and Pachisi, the ancestor of Ludo, and watched jugglers, wrestling and even elephant fights. Elephants, like velvet and silk clothing, were a sign of wealth and power.
 Tip: If a question asks about long-term impact, Urdu and Indian music are your strongest examples: both are still alive today.</a:t>
             </a:r>
@@ -5140,7 +5140,7 @@
                 <a:ea typeface="Calibri" pitchFamily="34" charset="-122"/>
                 <a:cs typeface="Calibri" pitchFamily="34" charset="-120"/>
               </a:rPr>
-              <a:t>Mughal paintings are known as miniatures because they were small enough to fit into a book.</a:t>
+              <a:t>Mughal paintings are called miniatures, because they were painted small, often small enough to sit on the page of a book.</a:t>
             </a:r>
             <a:endParaRPr lang="en-US" sz="2400" dirty="0"/>
           </a:p>
@@ -5726,36 +5726,36 @@
       </p:sp>
       <p:sp>
         <p:nvSpPr>
-          <p:cNvPr id="11" name="bullet-card"/>
+          <p:cNvPr id="11" name="point-card"/>
           <p:cNvSpPr/>
           <p:nvPr/>
         </p:nvSpPr>
         <p:spPr>
           <a:xfrm>
             <a:off x="548640" y="1389888"/>
-            <a:ext cx="11094415" cy="1017524"/>
+            <a:ext cx="3515258" cy="3686048"/>
           </a:xfrm>
           <a:prstGeom prst="roundRect">
             <a:avLst>
-              <a:gd name="adj" fmla="val 7189"/>
+              <a:gd name="adj" fmla="val 1561"/>
             </a:avLst>
           </a:prstGeom>
           <a:solidFill>
-            <a:srgbClr val="F6F3F0"/>
+            <a:srgbClr val="F4F0EC"/>
           </a:solidFill>
           <a:ln/>
         </p:spPr>
       </p:sp>
       <p:sp>
         <p:nvSpPr>
-          <p:cNvPr id="12" name="bullet-hex"/>
+          <p:cNvPr id="12" name="point-hex"/>
           <p:cNvSpPr/>
           <p:nvPr/>
         </p:nvSpPr>
         <p:spPr>
           <a:xfrm>
-            <a:off x="676656" y="1732357"/>
-            <a:ext cx="384048" cy="332586"/>
+            <a:off x="731520" y="1572768"/>
+            <a:ext cx="685800" cy="593903"/>
           </a:xfrm>
           <a:prstGeom prst="hexagon">
             <a:avLst/>
@@ -5768,30 +5768,69 @@
       </p:sp>
       <p:sp>
         <p:nvSpPr>
-          <p:cNvPr id="13" name="bullet"/>
-          <p:cNvSpPr txBox="1"/>
-          <p:nvPr/>
-        </p:nvSpPr>
-        <p:spPr>
-          <a:xfrm>
-            <a:off x="1143000" y="1389888"/>
-            <a:ext cx="10408615" cy="1017524"/>
-          </a:xfrm>
-          <a:prstGeom prst="rect">
-            <a:avLst/>
-          </a:prstGeom>
-          <a:noFill/>
-          <a:ln/>
-        </p:spPr>
-        <p:txBody>
-          <a:bodyPr wrap="square" lIns="63500" tIns="63500" rIns="63500" bIns="63500" rtlCol="0" anchor="ctr"/>
-          <a:lstStyle/>
-          <a:p>
-            <a:pPr algn="l" indent="0" marL="0">
-              <a:buNone/>
-            </a:pPr>
-            <a:r>
-              <a:rPr lang="en-US" sz="2200" dirty="0">
+          <p:cNvPr id="13" name="point-hex-label"/>
+          <p:cNvSpPr txBox="1"/>
+          <p:nvPr/>
+        </p:nvSpPr>
+        <p:spPr>
+          <a:xfrm>
+            <a:off x="731520" y="1572768"/>
+            <a:ext cx="685800" cy="593903"/>
+          </a:xfrm>
+          <a:prstGeom prst="rect">
+            <a:avLst/>
+          </a:prstGeom>
+          <a:noFill/>
+          <a:ln/>
+        </p:spPr>
+        <p:txBody>
+          <a:bodyPr wrap="square" lIns="0" tIns="0" rIns="0" bIns="0" rtlCol="0" anchor="ctr"/>
+          <a:lstStyle/>
+          <a:p>
+            <a:pPr algn="ctr" indent="0" marL="0">
+              <a:buNone/>
+            </a:pPr>
+            <a:r>
+              <a:rPr lang="en-US" sz="2400" b="1" dirty="0">
+                <a:solidFill>
+                  <a:srgbClr val="FFFFFF"/>
+                </a:solidFill>
+                <a:latin typeface="Cambria" pitchFamily="34" charset="0"/>
+                <a:ea typeface="Cambria" pitchFamily="34" charset="-122"/>
+                <a:cs typeface="Cambria" pitchFamily="34" charset="-120"/>
+              </a:rPr>
+              <a:t>1</a:t>
+            </a:r>
+            <a:endParaRPr lang="en-US" sz="2400" dirty="0"/>
+          </a:p>
+        </p:txBody>
+      </p:sp>
+      <p:sp>
+        <p:nvSpPr>
+          <p:cNvPr id="14" name="point"/>
+          <p:cNvSpPr txBox="1"/>
+          <p:nvPr/>
+        </p:nvSpPr>
+        <p:spPr>
+          <a:xfrm>
+            <a:off x="731520" y="2350008"/>
+            <a:ext cx="3149498" cy="2588768"/>
+          </a:xfrm>
+          <a:prstGeom prst="rect">
+            <a:avLst/>
+          </a:prstGeom>
+          <a:noFill/>
+          <a:ln/>
+        </p:spPr>
+        <p:txBody>
+          <a:bodyPr wrap="square" lIns="63500" tIns="63500" rIns="63500" bIns="63500" rtlCol="0" anchor="t"/>
+          <a:lstStyle/>
+          <a:p>
+            <a:pPr algn="l" indent="0" marL="0">
+              <a:buNone/>
+            </a:pPr>
+            <a:r>
+              <a:rPr lang="en-US" sz="1800" dirty="0">
                 <a:solidFill>
                   <a:srgbClr val="1E2229"/>
                 </a:solidFill>
@@ -5801,42 +5840,42 @@
               </a:rPr>
               <a:t>Many emperors enjoyed music, and Akbar was a musician himself who liked singing Hindu songs.</a:t>
             </a:r>
-            <a:endParaRPr lang="en-US" sz="2200" dirty="0"/>
-          </a:p>
-        </p:txBody>
-      </p:sp>
-      <p:sp>
-        <p:nvSpPr>
-          <p:cNvPr id="14" name="bullet-card"/>
+            <a:endParaRPr lang="en-US" sz="1800" dirty="0"/>
+          </a:p>
+        </p:txBody>
+      </p:sp>
+      <p:sp>
+        <p:nvSpPr>
+          <p:cNvPr id="15" name="point-card"/>
           <p:cNvSpPr/>
           <p:nvPr/>
         </p:nvSpPr>
         <p:spPr>
           <a:xfrm>
-            <a:off x="548640" y="2553716"/>
-            <a:ext cx="11094415" cy="1358392"/>
+            <a:off x="4338218" y="1389888"/>
+            <a:ext cx="3515258" cy="3686048"/>
           </a:xfrm>
           <a:prstGeom prst="roundRect">
             <a:avLst>
-              <a:gd name="adj" fmla="val 5385"/>
+              <a:gd name="adj" fmla="val 1561"/>
             </a:avLst>
           </a:prstGeom>
           <a:solidFill>
-            <a:srgbClr val="F6F3F0"/>
+            <a:srgbClr val="F8F2E9"/>
           </a:solidFill>
           <a:ln/>
         </p:spPr>
       </p:sp>
       <p:sp>
         <p:nvSpPr>
-          <p:cNvPr id="15" name="bullet-hex"/>
+          <p:cNvPr id="16" name="point-hex"/>
           <p:cNvSpPr/>
           <p:nvPr/>
         </p:nvSpPr>
         <p:spPr>
           <a:xfrm>
-            <a:off x="676656" y="3066619"/>
-            <a:ext cx="384048" cy="332586"/>
+            <a:off x="4521098" y="1572768"/>
+            <a:ext cx="685800" cy="593903"/>
           </a:xfrm>
           <a:prstGeom prst="hexagon">
             <a:avLst/>
@@ -5849,30 +5888,69 @@
       </p:sp>
       <p:sp>
         <p:nvSpPr>
-          <p:cNvPr id="16" name="bullet"/>
-          <p:cNvSpPr txBox="1"/>
-          <p:nvPr/>
-        </p:nvSpPr>
-        <p:spPr>
-          <a:xfrm>
-            <a:off x="1143000" y="2553716"/>
-            <a:ext cx="10408615" cy="1358392"/>
-          </a:xfrm>
-          <a:prstGeom prst="rect">
-            <a:avLst/>
-          </a:prstGeom>
-          <a:noFill/>
-          <a:ln/>
-        </p:spPr>
-        <p:txBody>
-          <a:bodyPr wrap="square" lIns="63500" tIns="63500" rIns="63500" bIns="63500" rtlCol="0" anchor="ctr"/>
-          <a:lstStyle/>
-          <a:p>
-            <a:pPr algn="l" indent="0" marL="0">
-              <a:buNone/>
-            </a:pPr>
-            <a:r>
-              <a:rPr lang="en-US" sz="2200" dirty="0">
+          <p:cNvPr id="17" name="point-hex-label"/>
+          <p:cNvSpPr txBox="1"/>
+          <p:nvPr/>
+        </p:nvSpPr>
+        <p:spPr>
+          <a:xfrm>
+            <a:off x="4521098" y="1572768"/>
+            <a:ext cx="685800" cy="593903"/>
+          </a:xfrm>
+          <a:prstGeom prst="rect">
+            <a:avLst/>
+          </a:prstGeom>
+          <a:noFill/>
+          <a:ln/>
+        </p:spPr>
+        <p:txBody>
+          <a:bodyPr wrap="square" lIns="0" tIns="0" rIns="0" bIns="0" rtlCol="0" anchor="ctr"/>
+          <a:lstStyle/>
+          <a:p>
+            <a:pPr algn="ctr" indent="0" marL="0">
+              <a:buNone/>
+            </a:pPr>
+            <a:r>
+              <a:rPr lang="en-US" sz="2400" b="1" dirty="0">
+                <a:solidFill>
+                  <a:srgbClr val="FFFFFF"/>
+                </a:solidFill>
+                <a:latin typeface="Cambria" pitchFamily="34" charset="0"/>
+                <a:ea typeface="Cambria" pitchFamily="34" charset="-122"/>
+                <a:cs typeface="Cambria" pitchFamily="34" charset="-120"/>
+              </a:rPr>
+              <a:t>2</a:t>
+            </a:r>
+            <a:endParaRPr lang="en-US" sz="2400" dirty="0"/>
+          </a:p>
+        </p:txBody>
+      </p:sp>
+      <p:sp>
+        <p:nvSpPr>
+          <p:cNvPr id="18" name="point"/>
+          <p:cNvSpPr txBox="1"/>
+          <p:nvPr/>
+        </p:nvSpPr>
+        <p:spPr>
+          <a:xfrm>
+            <a:off x="4521098" y="2350008"/>
+            <a:ext cx="3149498" cy="2588768"/>
+          </a:xfrm>
+          <a:prstGeom prst="rect">
+            <a:avLst/>
+          </a:prstGeom>
+          <a:noFill/>
+          <a:ln/>
+        </p:spPr>
+        <p:txBody>
+          <a:bodyPr wrap="square" lIns="63500" tIns="63500" rIns="63500" bIns="63500" rtlCol="0" anchor="t"/>
+          <a:lstStyle/>
+          <a:p>
+            <a:pPr algn="l" indent="0" marL="0">
+              <a:buNone/>
+            </a:pPr>
+            <a:r>
+              <a:rPr lang="en-US" sz="1800" dirty="0">
                 <a:solidFill>
                   <a:srgbClr val="1E2229"/>
                 </a:solidFill>
@@ -5880,44 +5958,44 @@
                 <a:ea typeface="Calibri" pitchFamily="34" charset="-122"/>
                 <a:cs typeface="Calibri" pitchFamily="34" charset="-120"/>
               </a:rPr>
-              <a:t>Akbar had his court historian write the Akbarnama, the Book of Akbar, in three volumes: the first on his birth and the reigns of Babur and Humayun, the second on his own reign, and the third on the Empire and the many cultures of India.</a:t>
-            </a:r>
-            <a:endParaRPr lang="en-US" sz="2200" dirty="0"/>
-          </a:p>
-        </p:txBody>
-      </p:sp>
-      <p:sp>
-        <p:nvSpPr>
-          <p:cNvPr id="17" name="bullet-card"/>
+              <a:t>Akbar had his court historian write the Akbarnama, the Book of Akbar, in three volumes: one on his birth and on the reigns of Babur and Humayun, one on his own reign, and one on the Empire and the many cultures of India.</a:t>
+            </a:r>
+            <a:endParaRPr lang="en-US" sz="1800" dirty="0"/>
+          </a:p>
+        </p:txBody>
+      </p:sp>
+      <p:sp>
+        <p:nvSpPr>
+          <p:cNvPr id="19" name="point-card"/>
           <p:cNvSpPr/>
           <p:nvPr/>
         </p:nvSpPr>
         <p:spPr>
           <a:xfrm>
-            <a:off x="548640" y="4058412"/>
-            <a:ext cx="11094415" cy="1017524"/>
+            <a:off x="8127797" y="1389888"/>
+            <a:ext cx="3515258" cy="3686048"/>
           </a:xfrm>
           <a:prstGeom prst="roundRect">
             <a:avLst>
-              <a:gd name="adj" fmla="val 7189"/>
+              <a:gd name="adj" fmla="val 1561"/>
             </a:avLst>
           </a:prstGeom>
           <a:solidFill>
-            <a:srgbClr val="F6F3F0"/>
+            <a:srgbClr val="F4F0EC"/>
           </a:solidFill>
           <a:ln/>
         </p:spPr>
       </p:sp>
       <p:sp>
         <p:nvSpPr>
-          <p:cNvPr id="18" name="bullet-hex"/>
+          <p:cNvPr id="20" name="point-hex"/>
           <p:cNvSpPr/>
           <p:nvPr/>
         </p:nvSpPr>
         <p:spPr>
           <a:xfrm>
-            <a:off x="676656" y="4400881"/>
-            <a:ext cx="384048" cy="332586"/>
+            <a:off x="8310677" y="1572768"/>
+            <a:ext cx="685800" cy="593903"/>
           </a:xfrm>
           <a:prstGeom prst="hexagon">
             <a:avLst/>
@@ -5930,30 +6008,69 @@
       </p:sp>
       <p:sp>
         <p:nvSpPr>
-          <p:cNvPr id="19" name="bullet"/>
-          <p:cNvSpPr txBox="1"/>
-          <p:nvPr/>
-        </p:nvSpPr>
-        <p:spPr>
-          <a:xfrm>
-            <a:off x="1143000" y="4058412"/>
-            <a:ext cx="10408615" cy="1017524"/>
-          </a:xfrm>
-          <a:prstGeom prst="rect">
-            <a:avLst/>
-          </a:prstGeom>
-          <a:noFill/>
-          <a:ln/>
-        </p:spPr>
-        <p:txBody>
-          <a:bodyPr wrap="square" lIns="63500" tIns="63500" rIns="63500" bIns="63500" rtlCol="0" anchor="ctr"/>
-          <a:lstStyle/>
-          <a:p>
-            <a:pPr algn="l" indent="0" marL="0">
-              <a:buNone/>
-            </a:pPr>
-            <a:r>
-              <a:rPr lang="en-US" sz="2200" dirty="0">
+          <p:cNvPr id="21" name="point-hex-label"/>
+          <p:cNvSpPr txBox="1"/>
+          <p:nvPr/>
+        </p:nvSpPr>
+        <p:spPr>
+          <a:xfrm>
+            <a:off x="8310677" y="1572768"/>
+            <a:ext cx="685800" cy="593903"/>
+          </a:xfrm>
+          <a:prstGeom prst="rect">
+            <a:avLst/>
+          </a:prstGeom>
+          <a:noFill/>
+          <a:ln/>
+        </p:spPr>
+        <p:txBody>
+          <a:bodyPr wrap="square" lIns="0" tIns="0" rIns="0" bIns="0" rtlCol="0" anchor="ctr"/>
+          <a:lstStyle/>
+          <a:p>
+            <a:pPr algn="ctr" indent="0" marL="0">
+              <a:buNone/>
+            </a:pPr>
+            <a:r>
+              <a:rPr lang="en-US" sz="2400" b="1" dirty="0">
+                <a:solidFill>
+                  <a:srgbClr val="FFFFFF"/>
+                </a:solidFill>
+                <a:latin typeface="Cambria" pitchFamily="34" charset="0"/>
+                <a:ea typeface="Cambria" pitchFamily="34" charset="-122"/>
+                <a:cs typeface="Cambria" pitchFamily="34" charset="-120"/>
+              </a:rPr>
+              <a:t>3</a:t>
+            </a:r>
+            <a:endParaRPr lang="en-US" sz="2400" dirty="0"/>
+          </a:p>
+        </p:txBody>
+      </p:sp>
+      <p:sp>
+        <p:nvSpPr>
+          <p:cNvPr id="22" name="point"/>
+          <p:cNvSpPr txBox="1"/>
+          <p:nvPr/>
+        </p:nvSpPr>
+        <p:spPr>
+          <a:xfrm>
+            <a:off x="8310677" y="2350008"/>
+            <a:ext cx="3149498" cy="2588768"/>
+          </a:xfrm>
+          <a:prstGeom prst="rect">
+            <a:avLst/>
+          </a:prstGeom>
+          <a:noFill/>
+          <a:ln/>
+        </p:spPr>
+        <p:txBody>
+          <a:bodyPr wrap="square" lIns="63500" tIns="63500" rIns="63500" bIns="63500" rtlCol="0" anchor="t"/>
+          <a:lstStyle/>
+          <a:p>
+            <a:pPr algn="l" indent="0" marL="0">
+              <a:buNone/>
+            </a:pPr>
+            <a:r>
+              <a:rPr lang="en-US" sz="1800" dirty="0">
                 <a:solidFill>
                   <a:srgbClr val="1E2229"/>
                 </a:solidFill>
@@ -5963,7 +6080,7 @@
               </a:rPr>
               <a:t>The Empire had many languages, including Persian, Arabic and Hindavi, and a new one, Urdu, was born there and is still spoken today.</a:t>
             </a:r>
-            <a:endParaRPr lang="en-US" sz="2200" dirty="0"/>
+            <a:endParaRPr lang="en-US" sz="1800" dirty="0"/>
           </a:p>
         </p:txBody>
       </p:sp>
